--- a/public/fun/pack/pptx/birthdaypro/돌잔치프리미엄_11_성장기록중심_플럼샴페인.pptx
+++ b/public/fun/pack/pptx/birthdaypro/돌잔치프리미엄_11_성장기록중심_플럼샴페인.pptx
@@ -112,12 +112,12 @@
   <p:extLst>
     <p:ext uri="{521415D9-36F7-43E2-AB2F-B90AF26B5E84}">
       <p14:sectionLst xmlns:p14="http://schemas.microsoft.com/office/powerpoint/2010/main">
-        <p14:section name="시작" id="{1A5AAB1A-5E1E-414A-8E96-B8FD7C7E8665}">
+        <p14:section name="시작" id="{701BA4F2-30A2-4A81-A4E1-B86B22DBB796}">
           <p14:sldIdLst>
             <p14:sldId id="256"/>
           </p14:sldIdLst>
         </p14:section>
-        <p14:section name="본문" id="{2BF125B9-9684-492A-92F4-3FF868D540FD}">
+        <p14:section name="본문" id="{2E750040-7CD7-4C48-87F4-F8A79C7A4284}">
           <p14:sldIdLst>
             <p14:sldId id="257"/>
             <p14:sldId id="258"/>
@@ -125,7 +125,7 @@
             <p14:sldId id="260"/>
           </p14:sldIdLst>
         </p14:section>
-        <p14:section name="마무리" id="{D4E528EB-9115-40AD-8A9A-0FA2174CDB2D}">
+        <p14:section name="마무리" id="{4D895E2E-1FD2-41BE-8501-29332C82B73B}">
           <p14:sldIdLst>
             <p14:sldId id="261"/>
           </p14:sldIdLst>
@@ -1656,7 +1656,7 @@
             </a:lvl1pPr>
           </a:lstStyle>
           <a:p>
-            <a:fld id="{8B0E360D-1FBA-451C-8B17-64733B2C9120}" type="slidenum">
+            <a:fld id="{5D1D87C9-0D26-4CAB-BD11-0BD5EA51B957}" type="slidenum">
               <a:rPr lang="en-US"/>
               <a:t>‹#›</a:t>
             </a:fld>
@@ -2309,7 +2309,7 @@
             </a:lvl1pPr>
           </a:lstStyle>
           <a:p>
-            <a:fld id="{0C3DBA7B-1335-4CE1-988A-7176D736D20C}" type="slidenum">
+            <a:fld id="{F8DC284E-DDCE-4168-B500-84BDF165D94E}" type="slidenum">
               <a:rPr lang="en-US"/>
               <a:t>‹#›</a:t>
             </a:fld>
@@ -2938,7 +2938,7 @@
             </a:lvl1pPr>
           </a:lstStyle>
           <a:p>
-            <a:fld id="{896FB0EF-D7DB-4B5A-8983-8668F34EF50E}" type="slidenum">
+            <a:fld id="{D2AE4D8B-4AB0-417B-A362-B0A57E9108C7}" type="slidenum">
               <a:rPr lang="en-US"/>
               <a:t>‹#›</a:t>
             </a:fld>
@@ -3813,7 +3813,7 @@
           <a:p>
             <a:r>
               <a:rPr lang="ko-KR"/>
-              <a:t>아기 이름 · 0000. 00. 00</a:t>
+              <a:t>아기 이름 · 날짜 입력</a:t>
             </a:r>
           </a:p>
           <a:p>
@@ -3973,7 +3973,7 @@
           <a:bodyPr/>
           <a:lstStyle/>
           <a:p>
-            <a:fld id="{A17DCADF-DF1F-4660-B2FE-DAA9F6B694AD}" type="slidenum">
+            <a:fld id="{D6BE6053-96B3-4D65-B6AE-2663E61B70FA}" type="slidenum">
               <a:rPr lang="en-US"/>
               <a:t>‹#›</a:t>
             </a:fld>
@@ -4573,7 +4573,7 @@
           <a:bodyPr/>
           <a:lstStyle/>
           <a:p>
-            <a:fld id="{0F3045B4-533D-4D85-AF93-DD11FD3DD3B3}" type="slidenum">
+            <a:fld id="{11875AA0-2388-4A73-9B5F-CA8680F5E186}" type="slidenum">
               <a:rPr lang="en-US"/>
               <a:t>‹#›</a:t>
             </a:fld>
@@ -5754,7 +5754,7 @@
           <a:bodyPr/>
           <a:lstStyle/>
           <a:p>
-            <a:fld id="{2A03DE8E-94D8-4690-9667-8C827DD66A52}" type="slidenum">
+            <a:fld id="{DBD74149-2C05-472D-B581-DE699E0FAAFD}" type="slidenum">
               <a:rPr lang="en-US"/>
               <a:t>‹#›</a:t>
             </a:fld>
@@ -6420,7 +6420,7 @@
           <a:bodyPr/>
           <a:lstStyle/>
           <a:p>
-            <a:fld id="{548EDDFA-B700-4FB1-8D28-0122A218D034}" type="slidenum">
+            <a:fld id="{976A8374-8161-4606-B742-2D0D9A9398F2}" type="slidenum">
               <a:rPr lang="en-US"/>
               <a:t>‹#›</a:t>
             </a:fld>
